--- a/CSCI250-Fall2026/content/Week06_Neural-Networks-DL/slides.pptx
+++ b/CSCI250-Fall2026/content/Week06_Neural-Networks-DL/slides.pptx
@@ -4619,7 +4619,7 @@
                 </a:solidFill>
                 <a:latin typeface="Calibri"/>
               </a:rPr>
-              <a:t>✓ No assignment — start reviewing Weeks 1–5 for the midterm</a:t>
+              <a:t>✓ Submit Assignment A6 (6 pts, due Sun Oct 4)</a:t>
             </a:r>
           </a:p>
         </p:txBody>
@@ -4973,7 +4973,7 @@
                 </a:solidFill>
                 <a:latin typeface="Calibri"/>
               </a:rPr>
-              <a:t>– No assignment — absorb fundamentals before the Week 7 midterm</a:t>
+              <a:t>– Lab: Assignment A6 (6 pts, due Sun Oct 4)</a:t>
             </a:r>
           </a:p>
         </p:txBody>
